--- a/lectures/第12讲谈一谈ParFlow建模中的spin-up/第12讲谈一谈ParFlow建模中的spin-up.pptx
+++ b/lectures/第12讲谈一谈ParFlow建模中的spin-up/第12讲谈一谈ParFlow建模中的spin-up.pptx
@@ -3450,7 +3450,21 @@
                 <a:latin typeface="Microsoft YaHei" panose="020B0503020204020204" pitchFamily="34" charset="-122"/>
                 <a:ea typeface="Microsoft YaHei" panose="020B0503020204020204" pitchFamily="34" charset="-122"/>
               </a:rPr>
-              <a:t>中山大学大气科学学院</a:t>
+              <a:t>中山大学</a:t>
+            </a:r>
+            <a:r>
+              <a:rPr lang="zh-CN" altLang="en-US" sz="3200" dirty="0">
+                <a:latin typeface="Microsoft YaHei" panose="020B0503020204020204" pitchFamily="34" charset="-122"/>
+                <a:ea typeface="Microsoft YaHei" panose="020B0503020204020204" pitchFamily="34" charset="-122"/>
+              </a:rPr>
+              <a:t> </a:t>
+            </a:r>
+            <a:r>
+              <a:rPr lang="en-US" sz="3200" dirty="0" err="1">
+                <a:latin typeface="Microsoft YaHei" panose="020B0503020204020204" pitchFamily="34" charset="-122"/>
+                <a:ea typeface="Microsoft YaHei" panose="020B0503020204020204" pitchFamily="34" charset="-122"/>
+              </a:rPr>
+              <a:t>大气科学学院</a:t>
             </a:r>
             <a:endParaRPr lang="en-US" sz="3200" dirty="0">
               <a:latin typeface="Microsoft YaHei" panose="020B0503020204020204" pitchFamily="34" charset="-122"/>
@@ -17908,7 +17922,7 @@
         <p:spPr>
           <a:xfrm>
             <a:off x="6996229" y="6031210"/>
-            <a:ext cx="4844246" cy="461665"/>
+            <a:ext cx="4844246" cy="369332"/>
           </a:xfrm>
           <a:prstGeom prst="rect">
             <a:avLst/>
@@ -17923,7 +17937,7 @@
           <a:p>
             <a:pPr algn="ctr"/>
             <a:r>
-              <a:rPr lang="en-US" altLang="zh-CN" sz="2400" i="1" dirty="0">
+              <a:rPr lang="en-US" altLang="zh-CN" i="1" dirty="0">
                 <a:latin typeface="Arial" panose="020B0604020202020204" pitchFamily="34" charset="0"/>
                 <a:ea typeface="Microsoft YaHei" panose="020B0503020204020204" pitchFamily="34" charset="-122"/>
                 <a:cs typeface="Arial" panose="020B0604020202020204" pitchFamily="34" charset="0"/>
@@ -17931,7 +17945,7 @@
               <a:t>Jadallah</a:t>
             </a:r>
             <a:r>
-              <a:rPr lang="zh-CN" altLang="en-US" sz="2400" i="1" dirty="0">
+              <a:rPr lang="zh-CN" altLang="en-US" i="1" dirty="0">
                 <a:latin typeface="Arial" panose="020B0604020202020204" pitchFamily="34" charset="0"/>
                 <a:ea typeface="Microsoft YaHei" panose="020B0503020204020204" pitchFamily="34" charset="-122"/>
                 <a:cs typeface="Arial" panose="020B0604020202020204" pitchFamily="34" charset="0"/>
@@ -17939,7 +17953,7 @@
               <a:t> </a:t>
             </a:r>
             <a:r>
-              <a:rPr lang="en-US" altLang="zh-CN" sz="2400" i="1" dirty="0">
+              <a:rPr lang="en-US" altLang="zh-CN" i="1" dirty="0">
                 <a:latin typeface="Arial" panose="020B0604020202020204" pitchFamily="34" charset="0"/>
                 <a:ea typeface="Microsoft YaHei" panose="020B0503020204020204" pitchFamily="34" charset="-122"/>
                 <a:cs typeface="Arial" panose="020B0604020202020204" pitchFamily="34" charset="0"/>
@@ -17947,7 +17961,7 @@
               <a:t>and</a:t>
             </a:r>
             <a:r>
-              <a:rPr lang="zh-CN" altLang="en-US" sz="2400" i="1" dirty="0">
+              <a:rPr lang="zh-CN" altLang="en-US" i="1" dirty="0">
                 <a:latin typeface="Arial" panose="020B0604020202020204" pitchFamily="34" charset="0"/>
                 <a:ea typeface="Microsoft YaHei" panose="020B0503020204020204" pitchFamily="34" charset="-122"/>
                 <a:cs typeface="Arial" panose="020B0604020202020204" pitchFamily="34" charset="0"/>
@@ -17955,7 +17969,7 @@
               <a:t> </a:t>
             </a:r>
             <a:r>
-              <a:rPr lang="en-US" altLang="zh-CN" sz="2400" i="1" dirty="0">
+              <a:rPr lang="en-US" altLang="zh-CN" i="1" dirty="0">
                 <a:latin typeface="Arial" panose="020B0604020202020204" pitchFamily="34" charset="0"/>
                 <a:ea typeface="Microsoft YaHei" panose="020B0503020204020204" pitchFamily="34" charset="-122"/>
                 <a:cs typeface="Arial" panose="020B0604020202020204" pitchFamily="34" charset="0"/>
@@ -17963,7 +17977,7 @@
               <a:t>Maxwell,</a:t>
             </a:r>
             <a:r>
-              <a:rPr lang="zh-CN" altLang="en-US" sz="2400" i="1" dirty="0">
+              <a:rPr lang="zh-CN" altLang="en-US" i="1" dirty="0">
                 <a:latin typeface="Arial" panose="020B0604020202020204" pitchFamily="34" charset="0"/>
                 <a:ea typeface="Microsoft YaHei" panose="020B0503020204020204" pitchFamily="34" charset="-122"/>
                 <a:cs typeface="Arial" panose="020B0604020202020204" pitchFamily="34" charset="0"/>
@@ -17971,7 +17985,7 @@
               <a:t> </a:t>
             </a:r>
             <a:r>
-              <a:rPr lang="en-US" altLang="zh-CN" sz="2400" i="1" dirty="0" err="1">
+              <a:rPr lang="en-US" altLang="zh-CN" i="1" dirty="0" err="1">
                 <a:latin typeface="Arial" panose="020B0604020202020204" pitchFamily="34" charset="0"/>
                 <a:ea typeface="Microsoft YaHei" panose="020B0503020204020204" pitchFamily="34" charset="-122"/>
                 <a:cs typeface="Arial" panose="020B0604020202020204" pitchFamily="34" charset="0"/>
@@ -17979,7 +17993,7 @@
               <a:t>JoH</a:t>
             </a:r>
             <a:r>
-              <a:rPr lang="en-US" altLang="zh-CN" sz="2400" i="1" dirty="0">
+              <a:rPr lang="en-US" altLang="zh-CN" i="1" dirty="0">
                 <a:latin typeface="Arial" panose="020B0604020202020204" pitchFamily="34" charset="0"/>
                 <a:ea typeface="Microsoft YaHei" panose="020B0503020204020204" pitchFamily="34" charset="-122"/>
                 <a:cs typeface="Arial" panose="020B0604020202020204" pitchFamily="34" charset="0"/>
@@ -17987,7 +18001,7 @@
               <a:t>,</a:t>
             </a:r>
             <a:r>
-              <a:rPr lang="zh-CN" altLang="en-US" sz="2400" i="1" dirty="0">
+              <a:rPr lang="zh-CN" altLang="en-US" i="1" dirty="0">
                 <a:latin typeface="Arial" panose="020B0604020202020204" pitchFamily="34" charset="0"/>
                 <a:ea typeface="Microsoft YaHei" panose="020B0503020204020204" pitchFamily="34" charset="-122"/>
                 <a:cs typeface="Arial" panose="020B0604020202020204" pitchFamily="34" charset="0"/>
@@ -17995,14 +18009,14 @@
               <a:t> </a:t>
             </a:r>
             <a:r>
-              <a:rPr lang="en-US" altLang="zh-CN" sz="2400" i="1" dirty="0">
+              <a:rPr lang="en-US" altLang="zh-CN" i="1" dirty="0">
                 <a:latin typeface="Arial" panose="020B0604020202020204" pitchFamily="34" charset="0"/>
                 <a:ea typeface="Microsoft YaHei" panose="020B0503020204020204" pitchFamily="34" charset="-122"/>
                 <a:cs typeface="Arial" panose="020B0604020202020204" pitchFamily="34" charset="0"/>
               </a:rPr>
               <a:t>2026</a:t>
             </a:r>
-            <a:endParaRPr lang="en-US" sz="1050" i="1" dirty="0">
+            <a:endParaRPr lang="en-US" sz="900" i="1" dirty="0">
               <a:latin typeface="Arial" panose="020B0604020202020204" pitchFamily="34" charset="0"/>
               <a:ea typeface="Microsoft YaHei" panose="020B0503020204020204" pitchFamily="34" charset="-122"/>
               <a:cs typeface="Arial" panose="020B0604020202020204" pitchFamily="34" charset="0"/>
@@ -18032,7 +18046,7 @@
         </p:blipFill>
         <p:spPr>
           <a:xfrm>
-            <a:off x="430427" y="1849355"/>
+            <a:off x="430427" y="1882245"/>
             <a:ext cx="4429726" cy="3465577"/>
           </a:xfrm>
           <a:prstGeom prst="rect">
@@ -18167,7 +18181,7 @@
         </p:blipFill>
         <p:spPr>
           <a:xfrm>
-            <a:off x="2806356" y="176319"/>
+            <a:off x="2539319" y="176319"/>
             <a:ext cx="6579287" cy="6505362"/>
           </a:xfrm>
           <a:prstGeom prst="rect">
